--- a/Cafe_Sales_DC.pptx
+++ b/Cafe_Sales_DC.pptx
@@ -366,7 +366,7 @@
           <a:p>
             <a:fld id="{5BCAD085-E8A6-8845-BD4E-CB4CCA059FC4}" type="datetimeFigureOut">
               <a:rPr lang="en-US" smtClean="0"/>
-              <a:t>21/09/2026</a:t>
+              <a:t>22/09/2026</a:t>
             </a:fld>
             <a:endParaRPr lang="en-US"/>
           </a:p>
@@ -574,7 +574,7 @@
           <a:p>
             <a:fld id="{5BCAD085-E8A6-8845-BD4E-CB4CCA059FC4}" type="datetimeFigureOut">
               <a:rPr lang="en-US" smtClean="0"/>
-              <a:t>21/09/2026</a:t>
+              <a:t>22/09/2026</a:t>
             </a:fld>
             <a:endParaRPr lang="en-US"/>
           </a:p>
@@ -830,7 +830,7 @@
           <a:p>
             <a:fld id="{5BCAD085-E8A6-8845-BD4E-CB4CCA059FC4}" type="datetimeFigureOut">
               <a:rPr lang="en-US" smtClean="0"/>
-              <a:t>21/09/2026</a:t>
+              <a:t>22/09/2026</a:t>
             </a:fld>
             <a:endParaRPr lang="en-US"/>
           </a:p>
@@ -1004,7 +1004,7 @@
           <a:p>
             <a:fld id="{5BCAD085-E8A6-8845-BD4E-CB4CCA059FC4}" type="datetimeFigureOut">
               <a:rPr lang="en-US" smtClean="0"/>
-              <a:t>21/09/2026</a:t>
+              <a:t>22/09/2026</a:t>
             </a:fld>
             <a:endParaRPr lang="en-US"/>
           </a:p>
@@ -1347,7 +1347,7 @@
           <a:p>
             <a:fld id="{5BCAD085-E8A6-8845-BD4E-CB4CCA059FC4}" type="datetimeFigureOut">
               <a:rPr lang="en-US" smtClean="0"/>
-              <a:t>21/09/2026</a:t>
+              <a:t>22/09/2026</a:t>
             </a:fld>
             <a:endParaRPr lang="en-US"/>
           </a:p>
@@ -1622,7 +1622,7 @@
           <a:p>
             <a:fld id="{5BCAD085-E8A6-8845-BD4E-CB4CCA059FC4}" type="datetimeFigureOut">
               <a:rPr lang="en-US" smtClean="0"/>
-              <a:t>21/09/2026</a:t>
+              <a:t>22/09/2026</a:t>
             </a:fld>
             <a:endParaRPr lang="en-US"/>
           </a:p>
@@ -2001,7 +2001,7 @@
           <a:p>
             <a:fld id="{5BCAD085-E8A6-8845-BD4E-CB4CCA059FC4}" type="datetimeFigureOut">
               <a:rPr lang="en-US" smtClean="0"/>
-              <a:t>21/09/2026</a:t>
+              <a:t>22/09/2026</a:t>
             </a:fld>
             <a:endParaRPr lang="en-US"/>
           </a:p>
@@ -2119,7 +2119,7 @@
           <a:p>
             <a:fld id="{5BCAD085-E8A6-8845-BD4E-CB4CCA059FC4}" type="datetimeFigureOut">
               <a:rPr lang="en-US" smtClean="0"/>
-              <a:t>21/09/2026</a:t>
+              <a:t>22/09/2026</a:t>
             </a:fld>
             <a:endParaRPr lang="en-US"/>
           </a:p>
@@ -2290,7 +2290,7 @@
           <a:p>
             <a:fld id="{5BCAD085-E8A6-8845-BD4E-CB4CCA059FC4}" type="datetimeFigureOut">
               <a:rPr lang="en-US" smtClean="0"/>
-              <a:t>21/09/2026</a:t>
+              <a:t>22/09/2026</a:t>
             </a:fld>
             <a:endParaRPr lang="en-US"/>
           </a:p>
@@ -2644,7 +2644,7 @@
           <a:p>
             <a:fld id="{5BCAD085-E8A6-8845-BD4E-CB4CCA059FC4}" type="datetimeFigureOut">
               <a:rPr lang="en-US" smtClean="0"/>
-              <a:t>21/09/2026</a:t>
+              <a:t>22/09/2026</a:t>
             </a:fld>
             <a:endParaRPr lang="en-US"/>
           </a:p>
@@ -3026,7 +3026,7 @@
           <a:p>
             <a:fld id="{5BCAD085-E8A6-8845-BD4E-CB4CCA059FC4}" type="datetimeFigureOut">
               <a:rPr lang="en-US" smtClean="0"/>
-              <a:t>21/09/2026</a:t>
+              <a:t>22/09/2026</a:t>
             </a:fld>
             <a:endParaRPr lang="en-US"/>
           </a:p>
@@ -3313,7 +3313,7 @@
           <a:p>
             <a:fld id="{5BCAD085-E8A6-8845-BD4E-CB4CCA059FC4}" type="datetimeFigureOut">
               <a:rPr lang="en-US" smtClean="0"/>
-              <a:t>21/09/2026</a:t>
+              <a:t>22/09/2026</a:t>
             </a:fld>
             <a:endParaRPr lang="en-US"/>
           </a:p>
@@ -4535,7 +4535,7 @@
         <p:spPr>
           <a:xfrm>
             <a:off x="594360" y="384048"/>
-            <a:ext cx="10972800" cy="566928"/>
+            <a:ext cx="4758034" cy="523220"/>
           </a:xfrm>
           <a:prstGeom prst="rect">
             <a:avLst/>
@@ -4557,7 +4557,20 @@
               </a:defRPr>
             </a:pPr>
             <a:r>
-              <a:t>9. Step 4 — Repair Quantity</a:t>
+              <a:rPr dirty="0"/>
+              <a:t>9. Step 4 — </a:t>
+            </a:r>
+            <a:r>
+              <a:rPr lang="en-US" dirty="0" smtClean="0"/>
+              <a:t>Clean</a:t>
+            </a:r>
+            <a:r>
+              <a:rPr dirty="0" smtClean="0"/>
+              <a:t> </a:t>
+            </a:r>
+            <a:r>
+              <a:rPr dirty="0"/>
+              <a:t>Quantity</a:t>
             </a:r>
           </a:p>
         </p:txBody>
@@ -5678,8 +5691,8 @@
         </p:nvSpPr>
         <p:spPr>
           <a:xfrm>
-            <a:off x="685800" y="1371600"/>
-            <a:ext cx="10881360" cy="2057400"/>
+            <a:off x="685800" y="1751162"/>
+            <a:ext cx="10881360" cy="1618488"/>
           </a:xfrm>
           <a:prstGeom prst="roundRect">
             <a:avLst/>
@@ -5724,7 +5737,7 @@
         </p:nvSpPr>
         <p:spPr>
           <a:xfrm>
-            <a:off x="795528" y="1527048"/>
+            <a:off x="795528" y="1906610"/>
             <a:ext cx="640080" cy="320040"/>
           </a:xfrm>
           <a:prstGeom prst="rect">
@@ -5760,7 +5773,7 @@
         </p:nvSpPr>
         <p:spPr>
           <a:xfrm>
-            <a:off x="1399032" y="1627632"/>
+            <a:off x="1399032" y="2007194"/>
             <a:ext cx="10012680" cy="356616"/>
           </a:xfrm>
           <a:prstGeom prst="rect">
@@ -5799,7 +5812,7 @@
         </p:nvSpPr>
         <p:spPr>
           <a:xfrm>
-            <a:off x="1399032" y="1938528"/>
+            <a:off x="1399032" y="2318090"/>
             <a:ext cx="10012680" cy="356616"/>
           </a:xfrm>
           <a:prstGeom prst="rect">
@@ -5838,7 +5851,7 @@
         </p:nvSpPr>
         <p:spPr>
           <a:xfrm>
-            <a:off x="1344168" y="2231136"/>
+            <a:off x="1344168" y="2610698"/>
             <a:ext cx="10058400" cy="329184"/>
           </a:xfrm>
           <a:prstGeom prst="rect">
@@ -5882,8 +5895,8 @@
         </p:nvSpPr>
         <p:spPr>
           <a:xfrm>
-            <a:off x="1399032" y="2249424"/>
-            <a:ext cx="10012680" cy="356616"/>
+            <a:off x="1399032" y="2656418"/>
+            <a:ext cx="5171609" cy="269304"/>
           </a:xfrm>
           <a:prstGeom prst="rect">
             <a:avLst/>
@@ -5908,91 +5921,26 @@
               </a:defRPr>
             </a:pPr>
             <a:r>
-              <a:t>    clean_cs.groupby("Item")["Quantity"].transform("median")</a:t>
-            </a:r>
-          </a:p>
-        </p:txBody>
-      </p:sp>
-      <p:sp>
-        <p:nvSpPr>
-          <p:cNvPr id="11" name="Rectangle 10"/>
-          <p:cNvSpPr/>
-          <p:nvPr/>
-        </p:nvSpPr>
-        <p:spPr>
-          <a:xfrm>
-            <a:off x="1344168" y="2542032"/>
-            <a:ext cx="10058400" cy="329184"/>
-          </a:xfrm>
-          <a:prstGeom prst="rect">
-            <a:avLst/>
-          </a:prstGeom>
-          <a:solidFill>
-            <a:srgbClr val="1E40AF"/>
-          </a:solidFill>
-          <a:ln>
-            <a:noFill/>
-          </a:ln>
-        </p:spPr>
-        <p:style>
-          <a:lnRef idx="1">
-            <a:schemeClr val="accent1"/>
-          </a:lnRef>
-          <a:fillRef idx="3">
-            <a:schemeClr val="accent1"/>
-          </a:fillRef>
-          <a:effectRef idx="2">
-            <a:schemeClr val="accent1"/>
-          </a:effectRef>
-          <a:fontRef idx="minor">
-            <a:schemeClr val="lt1"/>
-          </a:fontRef>
-        </p:style>
-        <p:txBody>
-          <a:bodyPr rtlCol="0" anchor="ctr"/>
-          <a:lstStyle/>
-          <a:p>
-            <a:pPr algn="ctr"/>
-            <a:endParaRPr/>
-          </a:p>
-        </p:txBody>
-      </p:sp>
-      <p:sp>
-        <p:nvSpPr>
-          <p:cNvPr id="12" name="TextBox 11"/>
-          <p:cNvSpPr txBox="1"/>
-          <p:nvPr/>
-        </p:nvSpPr>
-        <p:spPr>
-          <a:xfrm>
-            <a:off x="1399032" y="2560320"/>
-            <a:ext cx="10012680" cy="356616"/>
-          </a:xfrm>
-          <a:prstGeom prst="rect">
-            <a:avLst/>
-          </a:prstGeom>
-          <a:noFill/>
-        </p:spPr>
-        <p:txBody>
-          <a:bodyPr wrap="none">
-            <a:spAutoFit/>
-          </a:bodyPr>
-          <a:lstStyle/>
-          <a:p>
-            <a:pPr>
-              <a:spcAft>
-                <a:spcPts val="0"/>
-              </a:spcAft>
-              <a:defRPr sz="1150">
-                <a:solidFill>
-                  <a:srgbClr val="E2E8F0"/>
-                </a:solidFill>
-                <a:latin typeface="Consolas"/>
-              </a:defRPr>
-            </a:pPr>
-            <a:r>
+              <a:rPr dirty="0"/>
+              <a:t>    </a:t>
+            </a:r>
+            <a:r>
+              <a:rPr dirty="0" err="1"/>
+              <a:t>clean_cs.groupby</a:t>
+            </a:r>
+            <a:r>
+              <a:rPr dirty="0"/>
+              <a:t>("Item")["Quantity"].transform("median</a:t>
+            </a:r>
+            <a:r>
+              <a:rPr dirty="0" smtClean="0"/>
+              <a:t>")</a:t>
+            </a:r>
+            <a:r>
+              <a:rPr lang="en-US" dirty="0" smtClean="0"/>
               <a:t>)</a:t>
             </a:r>
+            <a:endParaRPr dirty="0"/>
           </a:p>
         </p:txBody>
       </p:sp>
@@ -6577,7 +6525,7 @@
         <p:spPr>
           <a:xfrm>
             <a:off x="594360" y="384048"/>
-            <a:ext cx="10972800" cy="566928"/>
+            <a:ext cx="5834674" cy="523220"/>
           </a:xfrm>
           <a:prstGeom prst="rect">
             <a:avLst/>
@@ -6599,7 +6547,20 @@
               </a:defRPr>
             </a:pPr>
             <a:r>
-              <a:t>11. Step 5 — Repair Price Per Unit</a:t>
+              <a:rPr dirty="0"/>
+              <a:t>11. Step 5 — </a:t>
+            </a:r>
+            <a:r>
+              <a:rPr lang="en-US" dirty="0" smtClean="0"/>
+              <a:t>Clean</a:t>
+            </a:r>
+            <a:r>
+              <a:rPr dirty="0" smtClean="0"/>
+              <a:t> </a:t>
+            </a:r>
+            <a:r>
+              <a:rPr dirty="0"/>
+              <a:t>Price Per Unit</a:t>
             </a:r>
           </a:p>
         </p:txBody>
@@ -7338,7 +7299,7 @@
         <p:spPr>
           <a:xfrm>
             <a:off x="822960" y="5577840"/>
-            <a:ext cx="10332720" cy="594360"/>
+            <a:ext cx="10332720" cy="651460"/>
           </a:xfrm>
           <a:prstGeom prst="rect">
             <a:avLst/>
@@ -7363,6 +7324,7 @@
               </a:defRPr>
             </a:pPr>
             <a:r>
+              <a:rPr sz="1400" dirty="0"/>
               <a:t>• First calculate the price from the transaction total and quantity.</a:t>
             </a:r>
           </a:p>
@@ -7379,6 +7341,7 @@
               </a:defRPr>
             </a:pPr>
             <a:r>
+              <a:rPr sz="1400" dirty="0"/>
               <a:t>• Any remaining missing prices are filled using the median Price Per Unit for the corresponding Item.</a:t>
             </a:r>
           </a:p>
@@ -7763,7 +7726,7 @@
         <p:spPr>
           <a:xfrm>
             <a:off x="594360" y="384048"/>
-            <a:ext cx="10972800" cy="566928"/>
+            <a:ext cx="5430269" cy="523220"/>
           </a:xfrm>
           <a:prstGeom prst="rect">
             <a:avLst/>
@@ -7785,7 +7748,20 @@
               </a:defRPr>
             </a:pPr>
             <a:r>
-              <a:t>12. Step 6 — Repair Total Spent</a:t>
+              <a:rPr dirty="0"/>
+              <a:t>12. Step 6 — </a:t>
+            </a:r>
+            <a:r>
+              <a:rPr lang="en-US" dirty="0" smtClean="0"/>
+              <a:t>Clean</a:t>
+            </a:r>
+            <a:r>
+              <a:rPr dirty="0" smtClean="0"/>
+              <a:t> </a:t>
+            </a:r>
+            <a:r>
+              <a:rPr dirty="0"/>
+              <a:t>Total Spent</a:t>
             </a:r>
           </a:p>
         </p:txBody>
@@ -8361,7 +8337,7 @@
         <p:spPr>
           <a:xfrm>
             <a:off x="822960" y="4572000"/>
-            <a:ext cx="10332720" cy="1325880"/>
+            <a:ext cx="10332720" cy="1272143"/>
           </a:xfrm>
           <a:prstGeom prst="rect">
             <a:avLst/>
@@ -8386,6 +8362,7 @@
               </a:defRPr>
             </a:pPr>
             <a:r>
+              <a:rPr dirty="0"/>
               <a:t>• A mask selects rows where Total Spent is missing but Quantity and Price Per Unit are available.</a:t>
             </a:r>
           </a:p>
@@ -8402,6 +8379,7 @@
               </a:defRPr>
             </a:pPr>
             <a:r>
+              <a:rPr dirty="0"/>
               <a:t>• The missing total is reconstructed from the two available transaction components.</a:t>
             </a:r>
           </a:p>
@@ -8418,7 +8396,20 @@
               </a:defRPr>
             </a:pPr>
             <a:r>
-              <a:t>• After the cleaning workflow, the notebook’s final descriptive output shows 10,000 populated values for Quantity, Price Per Unit and Total Spent.</a:t>
+              <a:rPr dirty="0"/>
+              <a:t>• After the cleaning workflow, the notebook’s final descriptive output shows 10,000 populated values for Quantity, Price Per </a:t>
+            </a:r>
+            <a:r>
+              <a:rPr lang="en-US" dirty="0" smtClean="0"/>
+              <a:t>            </a:t>
+            </a:r>
+            <a:r>
+              <a:rPr dirty="0" smtClean="0"/>
+              <a:t>Unit </a:t>
+            </a:r>
+            <a:r>
+              <a:rPr dirty="0"/>
+              <a:t>and Total Spent.</a:t>
             </a:r>
           </a:p>
         </p:txBody>
@@ -8909,7 +8900,7 @@
         <p:spPr>
           <a:xfrm>
             <a:off x="1353312" y="2836536"/>
-            <a:ext cx="10104120" cy="356616"/>
+            <a:ext cx="8359981" cy="269304"/>
           </a:xfrm>
           <a:prstGeom prst="rect">
             <a:avLst/>
@@ -8934,8 +8925,38 @@
               </a:defRPr>
             </a:pPr>
             <a:r>
-              <a:t>clean_cs["Payment Method"] = clean_cs["Payment Method"].fillna("Unknown")</a:t>
-            </a:r>
+              <a:rPr lang="en-IN" dirty="0" err="1"/>
+              <a:t>clean_cs</a:t>
+            </a:r>
+            <a:r>
+              <a:rPr lang="en-IN" dirty="0"/>
+              <a:t>["Payment Method"] = </a:t>
+            </a:r>
+            <a:r>
+              <a:rPr lang="en-IN" dirty="0" err="1"/>
+              <a:t>clean_cs</a:t>
+            </a:r>
+            <a:r>
+              <a:rPr lang="en-IN" dirty="0"/>
+              <a:t>["Payment Method"].</a:t>
+            </a:r>
+            <a:r>
+              <a:rPr lang="en-IN" dirty="0" err="1"/>
+              <a:t>fillna</a:t>
+            </a:r>
+            <a:r>
+              <a:rPr lang="en-IN" dirty="0"/>
+              <a:t>(</a:t>
+            </a:r>
+            <a:r>
+              <a:rPr lang="en-IN" dirty="0" err="1"/>
+              <a:t>clean_cs</a:t>
+            </a:r>
+            <a:r>
+              <a:rPr lang="en-IN" dirty="0"/>
+              <a:t>["Payment Method"].mode()[0])</a:t>
+            </a:r>
+            <a:endParaRPr dirty="0"/>
           </a:p>
         </p:txBody>
       </p:sp>
@@ -9151,7 +9172,7 @@
         <p:spPr>
           <a:xfrm>
             <a:off x="833312" y="5145657"/>
-            <a:ext cx="10332720" cy="502920"/>
+            <a:ext cx="10332720" cy="583750"/>
           </a:xfrm>
           <a:prstGeom prst="rect">
             <a:avLst/>
@@ -9177,7 +9198,11 @@
             </a:pPr>
             <a:r>
               <a:rPr dirty="0"/>
-              <a:t>• Payment Method: UNKNOWN / ERROR → missing → “Unknown”.</a:t>
+              <a:t>• Payment Method: UNKNOWN / ERROR → missing → </a:t>
+            </a:r>
+            <a:r>
+              <a:rPr lang="en-US" dirty="0" smtClean="0"/>
+              <a:t>filled with mode</a:t>
             </a:r>
           </a:p>
           <a:p>
@@ -9193,8 +9218,12 @@
               </a:defRPr>
             </a:pPr>
             <a:r>
+              <a:rPr dirty="0" smtClean="0"/>
+              <a:t>• </a:t>
+            </a:r>
+            <a:r>
               <a:rPr dirty="0"/>
-              <a:t>• Location: UNKNOWN → Takeaway, ERROR → In-store; remaining missing values are filled with the mode.</a:t>
+              <a:t>Location: UNKNOWN → Takeaway, ERROR → In-store; remaining missing values are filled with the mode.</a:t>
             </a:r>
           </a:p>
         </p:txBody>
@@ -9479,8 +9508,8 @@
         </p:nvSpPr>
         <p:spPr>
           <a:xfrm>
-            <a:off x="640080" y="2301527"/>
-            <a:ext cx="10972800" cy="1959922"/>
+            <a:off x="640080" y="1887457"/>
+            <a:ext cx="10972800" cy="2615531"/>
           </a:xfrm>
           <a:prstGeom prst="roundRect">
             <a:avLst/>
@@ -9525,7 +9554,7 @@
         </p:nvSpPr>
         <p:spPr>
           <a:xfrm>
-            <a:off x="676656" y="2456975"/>
+            <a:off x="676656" y="2042906"/>
             <a:ext cx="640080" cy="320040"/>
           </a:xfrm>
           <a:prstGeom prst="rect">
@@ -9562,7 +9591,7 @@
         </p:nvSpPr>
         <p:spPr>
           <a:xfrm>
-            <a:off x="1298448" y="2573781"/>
+            <a:off x="1298448" y="2142463"/>
             <a:ext cx="10149840" cy="329184"/>
           </a:xfrm>
           <a:prstGeom prst="rect">
@@ -9606,7 +9635,7 @@
         </p:nvSpPr>
         <p:spPr>
           <a:xfrm>
-            <a:off x="1353312" y="2557559"/>
+            <a:off x="1353312" y="2143490"/>
             <a:ext cx="10104120" cy="356616"/>
           </a:xfrm>
           <a:prstGeom prst="rect">
@@ -9632,7 +9661,28 @@
               </a:defRPr>
             </a:pPr>
             <a:r>
-              <a:t>clean_cs["Transaction Date"] = clean_cs["Transaction Date"].replace(["UNKNOWN", "ERROR"], np.nan)</a:t>
+              <a:rPr dirty="0" err="1"/>
+              <a:t>clean_cs</a:t>
+            </a:r>
+            <a:r>
+              <a:rPr dirty="0"/>
+              <a:t>["Transaction Date"] = </a:t>
+            </a:r>
+            <a:r>
+              <a:rPr dirty="0" err="1"/>
+              <a:t>clean_cs</a:t>
+            </a:r>
+            <a:r>
+              <a:rPr dirty="0"/>
+              <a:t>["Transaction Date"].replace(["UNKNOWN", "ERROR"], </a:t>
+            </a:r>
+            <a:r>
+              <a:rPr dirty="0" err="1"/>
+              <a:t>np.nan</a:t>
+            </a:r>
+            <a:r>
+              <a:rPr dirty="0"/>
+              <a:t>)</a:t>
             </a:r>
           </a:p>
         </p:txBody>
@@ -9682,7 +9732,7 @@
         </p:nvSpPr>
         <p:spPr>
           <a:xfrm>
-            <a:off x="1298448" y="3195573"/>
+            <a:off x="1298448" y="2764255"/>
             <a:ext cx="10149840" cy="329184"/>
           </a:xfrm>
           <a:prstGeom prst="rect">
@@ -9720,52 +9770,13 @@
       </p:sp>
       <p:sp>
         <p:nvSpPr>
-          <p:cNvPr id="11" name="TextBox 10"/>
-          <p:cNvSpPr txBox="1"/>
-          <p:nvPr/>
-        </p:nvSpPr>
-        <p:spPr>
-          <a:xfrm>
-            <a:off x="1353312" y="3179351"/>
-            <a:ext cx="10104120" cy="356616"/>
-          </a:xfrm>
-          <a:prstGeom prst="rect">
-            <a:avLst/>
-          </a:prstGeom>
-          <a:noFill/>
-        </p:spPr>
-        <p:txBody>
-          <a:bodyPr wrap="none">
-            <a:spAutoFit/>
-          </a:bodyPr>
-          <a:lstStyle/>
-          <a:p>
-            <a:pPr>
-              <a:spcAft>
-                <a:spcPts val="0"/>
-              </a:spcAft>
-              <a:defRPr sz="1150">
-                <a:solidFill>
-                  <a:srgbClr val="E2E8F0"/>
-                </a:solidFill>
-                <a:latin typeface="Consolas"/>
-              </a:defRPr>
-            </a:pPr>
-            <a:r>
-              <a:t>clean_cs.describe()</a:t>
-            </a:r>
-          </a:p>
-        </p:txBody>
-      </p:sp>
-      <p:sp>
-        <p:nvSpPr>
           <p:cNvPr id="12" name="Rectangle 11"/>
           <p:cNvSpPr/>
           <p:nvPr/>
         </p:nvSpPr>
         <p:spPr>
           <a:xfrm>
-            <a:off x="1298448" y="3757756"/>
+            <a:off x="1298448" y="3326438"/>
             <a:ext cx="10149840" cy="329184"/>
           </a:xfrm>
           <a:prstGeom prst="rect">
@@ -9840,45 +9851,6 @@
       </p:sp>
       <p:sp>
         <p:nvSpPr>
-          <p:cNvPr id="14" name="TextBox 13"/>
-          <p:cNvSpPr txBox="1"/>
-          <p:nvPr/>
-        </p:nvSpPr>
-        <p:spPr>
-          <a:xfrm>
-            <a:off x="1353312" y="3801143"/>
-            <a:ext cx="10104120" cy="356616"/>
-          </a:xfrm>
-          <a:prstGeom prst="rect">
-            <a:avLst/>
-          </a:prstGeom>
-          <a:noFill/>
-        </p:spPr>
-        <p:txBody>
-          <a:bodyPr wrap="none">
-            <a:spAutoFit/>
-          </a:bodyPr>
-          <a:lstStyle/>
-          <a:p>
-            <a:pPr>
-              <a:spcAft>
-                <a:spcPts val="0"/>
-              </a:spcAft>
-              <a:defRPr sz="1150">
-                <a:solidFill>
-                  <a:srgbClr val="E2E8F0"/>
-                </a:solidFill>
-                <a:latin typeface="Consolas"/>
-              </a:defRPr>
-            </a:pPr>
-            <a:r>
-              <a:t>clean_cs.duplicated().sum()</a:t>
-            </a:r>
-          </a:p>
-        </p:txBody>
-      </p:sp>
-      <p:sp>
-        <p:nvSpPr>
           <p:cNvPr id="15" name="TextBox 14"/>
           <p:cNvSpPr txBox="1"/>
           <p:nvPr/>
@@ -9886,7 +9858,7 @@
         <p:spPr>
           <a:xfrm>
             <a:off x="822960" y="5102524"/>
-            <a:ext cx="10241280" cy="457200"/>
+            <a:ext cx="10241280" cy="574516"/>
           </a:xfrm>
           <a:prstGeom prst="rect">
             <a:avLst/>
@@ -9912,8 +9884,33 @@
             </a:pPr>
             <a:r>
               <a:rPr dirty="0"/>
-              <a:t>• The notebook replaces UNKNOWN / ERROR in Transaction Date with missing values.</a:t>
-            </a:r>
+              <a:t>• </a:t>
+            </a:r>
+            <a:r>
+              <a:rPr lang="en-US" dirty="0"/>
+              <a:t>R</a:t>
+            </a:r>
+            <a:r>
+              <a:rPr dirty="0" smtClean="0"/>
+              <a:t>eplace UNKNOWN </a:t>
+            </a:r>
+            <a:r>
+              <a:rPr dirty="0"/>
+              <a:t>/ ERROR in Transaction Date with missing </a:t>
+            </a:r>
+            <a:r>
+              <a:rPr dirty="0" smtClean="0"/>
+              <a:t>values</a:t>
+            </a:r>
+            <a:r>
+              <a:rPr lang="en-US" dirty="0" smtClean="0"/>
+              <a:t>, and fill the null values with interpolate()</a:t>
+            </a:r>
+            <a:r>
+              <a:rPr dirty="0" smtClean="0"/>
+              <a:t>.</a:t>
+            </a:r>
+            <a:endParaRPr dirty="0"/>
           </a:p>
           <a:p>
             <a:pPr>
@@ -10044,6 +10041,207 @@
           </a:fontRef>
         </p:style>
       </p:cxnSp>
+      <p:sp>
+        <p:nvSpPr>
+          <p:cNvPr id="19" name="Rectangle 18"/>
+          <p:cNvSpPr/>
+          <p:nvPr/>
+        </p:nvSpPr>
+        <p:spPr>
+          <a:xfrm>
+            <a:off x="1307592" y="3920968"/>
+            <a:ext cx="10149840" cy="329184"/>
+          </a:xfrm>
+          <a:prstGeom prst="rect">
+            <a:avLst/>
+          </a:prstGeom>
+          <a:solidFill>
+            <a:srgbClr val="1E40AF"/>
+          </a:solidFill>
+          <a:ln>
+            <a:noFill/>
+          </a:ln>
+        </p:spPr>
+        <p:style>
+          <a:lnRef idx="1">
+            <a:schemeClr val="accent1"/>
+          </a:lnRef>
+          <a:fillRef idx="3">
+            <a:schemeClr val="accent1"/>
+          </a:fillRef>
+          <a:effectRef idx="2">
+            <a:schemeClr val="accent1"/>
+          </a:effectRef>
+          <a:fontRef idx="minor">
+            <a:schemeClr val="lt1"/>
+          </a:fontRef>
+        </p:style>
+        <p:txBody>
+          <a:bodyPr rtlCol="0" anchor="ctr"/>
+          <a:lstStyle/>
+          <a:p>
+            <a:pPr algn="ctr"/>
+            <a:endParaRPr dirty="0"/>
+          </a:p>
+        </p:txBody>
+      </p:sp>
+      <p:sp>
+        <p:nvSpPr>
+          <p:cNvPr id="14" name="TextBox 13"/>
+          <p:cNvSpPr txBox="1"/>
+          <p:nvPr/>
+        </p:nvSpPr>
+        <p:spPr>
+          <a:xfrm>
+            <a:off x="1353312" y="3938734"/>
+            <a:ext cx="10104120" cy="356616"/>
+          </a:xfrm>
+          <a:prstGeom prst="rect">
+            <a:avLst/>
+          </a:prstGeom>
+          <a:noFill/>
+        </p:spPr>
+        <p:txBody>
+          <a:bodyPr wrap="none">
+            <a:spAutoFit/>
+          </a:bodyPr>
+          <a:lstStyle/>
+          <a:p>
+            <a:pPr>
+              <a:spcAft>
+                <a:spcPts val="0"/>
+              </a:spcAft>
+              <a:defRPr sz="1150">
+                <a:solidFill>
+                  <a:srgbClr val="E2E8F0"/>
+                </a:solidFill>
+                <a:latin typeface="Consolas"/>
+              </a:defRPr>
+            </a:pPr>
+            <a:r>
+              <a:rPr dirty="0" err="1"/>
+              <a:t>clean_cs.duplicated</a:t>
+            </a:r>
+            <a:r>
+              <a:rPr dirty="0"/>
+              <a:t>().sum()</a:t>
+            </a:r>
+          </a:p>
+        </p:txBody>
+      </p:sp>
+      <p:sp>
+        <p:nvSpPr>
+          <p:cNvPr id="11" name="TextBox 10"/>
+          <p:cNvSpPr txBox="1"/>
+          <p:nvPr/>
+        </p:nvSpPr>
+        <p:spPr>
+          <a:xfrm>
+            <a:off x="1344168" y="3343250"/>
+            <a:ext cx="10104120" cy="356616"/>
+          </a:xfrm>
+          <a:prstGeom prst="rect">
+            <a:avLst/>
+          </a:prstGeom>
+          <a:noFill/>
+        </p:spPr>
+        <p:txBody>
+          <a:bodyPr wrap="none">
+            <a:spAutoFit/>
+          </a:bodyPr>
+          <a:lstStyle/>
+          <a:p>
+            <a:pPr>
+              <a:spcAft>
+                <a:spcPts val="0"/>
+              </a:spcAft>
+              <a:defRPr sz="1150">
+                <a:solidFill>
+                  <a:srgbClr val="E2E8F0"/>
+                </a:solidFill>
+                <a:latin typeface="Consolas"/>
+              </a:defRPr>
+            </a:pPr>
+            <a:r>
+              <a:rPr dirty="0" err="1"/>
+              <a:t>clean_cs.describe</a:t>
+            </a:r>
+            <a:r>
+              <a:rPr dirty="0"/>
+              <a:t>()</a:t>
+            </a:r>
+          </a:p>
+        </p:txBody>
+      </p:sp>
+      <p:sp>
+        <p:nvSpPr>
+          <p:cNvPr id="20" name="TextBox 19"/>
+          <p:cNvSpPr txBox="1"/>
+          <p:nvPr/>
+        </p:nvSpPr>
+        <p:spPr>
+          <a:xfrm>
+            <a:off x="1353312" y="2798932"/>
+            <a:ext cx="9259266" cy="269304"/>
+          </a:xfrm>
+          <a:prstGeom prst="rect">
+            <a:avLst/>
+          </a:prstGeom>
+          <a:noFill/>
+        </p:spPr>
+        <p:txBody>
+          <a:bodyPr wrap="none">
+            <a:spAutoFit/>
+          </a:bodyPr>
+          <a:lstStyle/>
+          <a:p>
+            <a:pPr>
+              <a:spcAft>
+                <a:spcPts val="0"/>
+              </a:spcAft>
+              <a:defRPr sz="1150">
+                <a:solidFill>
+                  <a:srgbClr val="E2E8F0"/>
+                </a:solidFill>
+                <a:latin typeface="Consolas"/>
+              </a:defRPr>
+            </a:pPr>
+            <a:r>
+              <a:rPr lang="en-US" dirty="0" err="1"/>
+              <a:t>clean_cs</a:t>
+            </a:r>
+            <a:r>
+              <a:rPr lang="en-US" dirty="0"/>
+              <a:t> ["Transaction Date"] = </a:t>
+            </a:r>
+            <a:r>
+              <a:rPr lang="en-US" dirty="0" err="1"/>
+              <a:t>clean_cs</a:t>
+            </a:r>
+            <a:r>
+              <a:rPr lang="en-US" dirty="0"/>
+              <a:t>["Transaction Date"].</a:t>
+            </a:r>
+            <a:r>
+              <a:rPr lang="en-US" dirty="0" err="1"/>
+              <a:t>fillna</a:t>
+            </a:r>
+            <a:r>
+              <a:rPr lang="en-US" dirty="0"/>
+              <a:t>(</a:t>
+            </a:r>
+            <a:r>
+              <a:rPr lang="en-US" dirty="0" err="1"/>
+              <a:t>clean_cs</a:t>
+            </a:r>
+            <a:r>
+              <a:rPr lang="en-US" dirty="0"/>
+              <a:t>["Transaction Date"].interpolate())</a:t>
+            </a:r>
+            <a:endParaRPr dirty="0"/>
+          </a:p>
+        </p:txBody>
+      </p:sp>
     </p:spTree>
   </p:cSld>
   <p:clrMapOvr>
@@ -11999,8 +12197,8 @@
         </p:nvSpPr>
         <p:spPr>
           <a:xfrm>
-            <a:off x="822960" y="1417320"/>
-            <a:ext cx="10332720" cy="2544286"/>
+            <a:off x="822960" y="1694117"/>
+            <a:ext cx="10332720" cy="2139047"/>
           </a:xfrm>
           <a:prstGeom prst="rect">
             <a:avLst/>
@@ -12078,25 +12276,13 @@
             </a:pPr>
             <a:r>
               <a:rPr dirty="0"/>
-              <a:t>• Relationships between Quantity, Price Per Unit and Total Spent are used to recover missing numeric values.</a:t>
-            </a:r>
-          </a:p>
-          <a:p>
-            <a:pPr>
-              <a:spcAft>
-                <a:spcPts val="1000"/>
-              </a:spcAft>
-              <a:defRPr sz="1800">
-                <a:solidFill>
-                  <a:srgbClr val="FFFFFF"/>
-                </a:solidFill>
-                <a:latin typeface="Aptos"/>
-              </a:defRPr>
-            </a:pPr>
-            <a:r>
-              <a:rPr dirty="0"/>
-              <a:t>• The final dataset preserves all 10,000 rows while improving consistency and completeness.</a:t>
-            </a:r>
+              <a:t>• Relationships between Quantity, Price Per Unit and Total Spent are used to recover missing numeric values</a:t>
+            </a:r>
+            <a:r>
+              <a:rPr dirty="0" smtClean="0"/>
+              <a:t>.</a:t>
+            </a:r>
+            <a:endParaRPr dirty="0"/>
           </a:p>
         </p:txBody>
       </p:sp>
@@ -17115,8 +17301,8 @@
         </p:nvSpPr>
         <p:spPr>
           <a:xfrm>
-            <a:off x="685799" y="2036694"/>
-            <a:ext cx="11089257" cy="2707832"/>
+            <a:off x="685799" y="1691634"/>
+            <a:ext cx="11089257" cy="3134448"/>
           </a:xfrm>
           <a:prstGeom prst="roundRect">
             <a:avLst/>
@@ -17161,7 +17347,7 @@
         </p:nvSpPr>
         <p:spPr>
           <a:xfrm>
-            <a:off x="736093" y="2215002"/>
+            <a:off x="736093" y="2171865"/>
             <a:ext cx="640080" cy="320040"/>
           </a:xfrm>
           <a:prstGeom prst="rect">
@@ -17198,7 +17384,7 @@
         </p:nvSpPr>
         <p:spPr>
           <a:xfrm>
-            <a:off x="1344168" y="2239929"/>
+            <a:off x="1344168" y="2205423"/>
             <a:ext cx="10058400" cy="329184"/>
           </a:xfrm>
           <a:prstGeom prst="rect">
@@ -17242,7 +17428,7 @@
         </p:nvSpPr>
         <p:spPr>
           <a:xfrm>
-            <a:off x="1399032" y="2292726"/>
+            <a:off x="1399032" y="2249589"/>
             <a:ext cx="10012680" cy="356616"/>
           </a:xfrm>
           <a:prstGeom prst="rect">
@@ -17275,13 +17461,13 @@
       </p:sp>
       <p:sp>
         <p:nvSpPr>
-          <p:cNvPr id="9" name="TextBox 8"/>
-          <p:cNvSpPr txBox="1"/>
-          <p:nvPr/>
-        </p:nvSpPr>
-        <p:spPr>
-          <a:xfrm>
-            <a:off x="1399032" y="2603622"/>
+          <p:cNvPr id="11" name="TextBox 10"/>
+          <p:cNvSpPr txBox="1"/>
+          <p:nvPr/>
+        </p:nvSpPr>
+        <p:spPr>
+          <a:xfrm>
+            <a:off x="1376173" y="3044510"/>
             <a:ext cx="10012680" cy="356616"/>
           </a:xfrm>
           <a:prstGeom prst="rect">
@@ -17307,20 +17493,20 @@
               </a:defRPr>
             </a:pPr>
             <a:r>
-              <a:t>import numpy as np</a:t>
-            </a:r>
-          </a:p>
-        </p:txBody>
-      </p:sp>
-      <p:sp>
-        <p:nvSpPr>
-          <p:cNvPr id="10" name="Rectangle 9"/>
+              <a:t>print("import Done")</a:t>
+            </a:r>
+          </a:p>
+        </p:txBody>
+      </p:sp>
+      <p:sp>
+        <p:nvSpPr>
+          <p:cNvPr id="13" name="Rectangle 12"/>
           <p:cNvSpPr/>
           <p:nvPr/>
         </p:nvSpPr>
         <p:spPr>
           <a:xfrm>
-            <a:off x="1344168" y="2861721"/>
+            <a:off x="1344168" y="3449007"/>
             <a:ext cx="10058400" cy="329184"/>
           </a:xfrm>
           <a:prstGeom prst="rect">
@@ -17358,13 +17544,13 @@
       </p:sp>
       <p:sp>
         <p:nvSpPr>
-          <p:cNvPr id="11" name="TextBox 10"/>
-          <p:cNvSpPr txBox="1"/>
-          <p:nvPr/>
-        </p:nvSpPr>
-        <p:spPr>
-          <a:xfrm>
-            <a:off x="1399032" y="2914518"/>
+          <p:cNvPr id="14" name="TextBox 13"/>
+          <p:cNvSpPr txBox="1"/>
+          <p:nvPr/>
+        </p:nvSpPr>
+        <p:spPr>
+          <a:xfrm>
+            <a:off x="1399032" y="3493173"/>
             <a:ext cx="10012680" cy="356616"/>
           </a:xfrm>
           <a:prstGeom prst="rect">
@@ -17390,20 +17576,20 @@
               </a:defRPr>
             </a:pPr>
             <a:r>
-              <a:t>print("import Done")</a:t>
-            </a:r>
-          </a:p>
-        </p:txBody>
-      </p:sp>
-      <p:sp>
-        <p:nvSpPr>
-          <p:cNvPr id="12" name="TextBox 11"/>
-          <p:cNvSpPr txBox="1"/>
-          <p:nvPr/>
-        </p:nvSpPr>
-        <p:spPr>
-          <a:xfrm>
-            <a:off x="1399032" y="2423160"/>
+              <a:t>cs = pd.read_csv("dirty_cafe_sales.csv")</a:t>
+            </a:r>
+          </a:p>
+        </p:txBody>
+      </p:sp>
+      <p:sp>
+        <p:nvSpPr>
+          <p:cNvPr id="15" name="TextBox 14"/>
+          <p:cNvSpPr txBox="1"/>
+          <p:nvPr/>
+        </p:nvSpPr>
+        <p:spPr>
+          <a:xfrm>
+            <a:off x="1399032" y="3804069"/>
             <a:ext cx="10012680" cy="356616"/>
           </a:xfrm>
           <a:prstGeom prst="rect">
@@ -17428,19 +17614,21 @@
                 <a:latin typeface="Consolas"/>
               </a:defRPr>
             </a:pPr>
-            <a:endParaRPr/>
-          </a:p>
-        </p:txBody>
-      </p:sp>
-      <p:sp>
-        <p:nvSpPr>
-          <p:cNvPr id="13" name="Rectangle 12"/>
+            <a:r>
+              <a:t>print("Read Done")</a:t>
+            </a:r>
+          </a:p>
+        </p:txBody>
+      </p:sp>
+      <p:sp>
+        <p:nvSpPr>
+          <p:cNvPr id="16" name="Rectangle 15"/>
           <p:cNvSpPr/>
           <p:nvPr/>
         </p:nvSpPr>
         <p:spPr>
           <a:xfrm>
-            <a:off x="1344168" y="3483513"/>
+            <a:off x="1344168" y="4094785"/>
             <a:ext cx="10058400" cy="329184"/>
           </a:xfrm>
           <a:prstGeom prst="rect">
@@ -17472,19 +17660,19 @@
           <a:lstStyle/>
           <a:p>
             <a:pPr algn="ctr"/>
-            <a:endParaRPr/>
-          </a:p>
-        </p:txBody>
-      </p:sp>
-      <p:sp>
-        <p:nvSpPr>
-          <p:cNvPr id="14" name="TextBox 13"/>
-          <p:cNvSpPr txBox="1"/>
-          <p:nvPr/>
-        </p:nvSpPr>
-        <p:spPr>
-          <a:xfrm>
-            <a:off x="1399032" y="3536310"/>
+            <a:endParaRPr dirty="0"/>
+          </a:p>
+        </p:txBody>
+      </p:sp>
+      <p:sp>
+        <p:nvSpPr>
+          <p:cNvPr id="17" name="TextBox 16"/>
+          <p:cNvSpPr txBox="1"/>
+          <p:nvPr/>
+        </p:nvSpPr>
+        <p:spPr>
+          <a:xfrm>
+            <a:off x="1399032" y="4123593"/>
             <a:ext cx="10012680" cy="356616"/>
           </a:xfrm>
           <a:prstGeom prst="rect">
@@ -17509,21 +17697,19 @@
                 <a:latin typeface="Consolas"/>
               </a:defRPr>
             </a:pPr>
-            <a:r>
-              <a:t>cs = pd.read_csv("dirty_cafe_sales.csv")</a:t>
-            </a:r>
-          </a:p>
-        </p:txBody>
-      </p:sp>
-      <p:sp>
-        <p:nvSpPr>
-          <p:cNvPr id="15" name="TextBox 14"/>
-          <p:cNvSpPr txBox="1"/>
-          <p:nvPr/>
-        </p:nvSpPr>
-        <p:spPr>
-          <a:xfrm>
-            <a:off x="1399032" y="3847206"/>
+            <a:endParaRPr/>
+          </a:p>
+        </p:txBody>
+      </p:sp>
+      <p:sp>
+        <p:nvSpPr>
+          <p:cNvPr id="18" name="TextBox 17"/>
+          <p:cNvSpPr txBox="1"/>
+          <p:nvPr/>
+        </p:nvSpPr>
+        <p:spPr>
+          <a:xfrm>
+            <a:off x="1389888" y="4115086"/>
             <a:ext cx="10012680" cy="356616"/>
           </a:xfrm>
           <a:prstGeom prst="rect">
@@ -17549,20 +17735,196 @@
               </a:defRPr>
             </a:pPr>
             <a:r>
-              <a:t>print("Read Done")</a:t>
-            </a:r>
-          </a:p>
-        </p:txBody>
-      </p:sp>
-      <p:sp>
-        <p:nvSpPr>
-          <p:cNvPr id="16" name="Rectangle 15"/>
+              <a:rPr dirty="0"/>
+              <a:t>cs.info()</a:t>
+            </a:r>
+          </a:p>
+        </p:txBody>
+      </p:sp>
+      <p:sp>
+        <p:nvSpPr>
+          <p:cNvPr id="19" name="TextBox 18"/>
+          <p:cNvSpPr txBox="1"/>
+          <p:nvPr/>
+        </p:nvSpPr>
+        <p:spPr>
+          <a:xfrm>
+            <a:off x="816489" y="5308302"/>
+            <a:ext cx="10332720" cy="640080"/>
+          </a:xfrm>
+          <a:prstGeom prst="rect">
+            <a:avLst/>
+          </a:prstGeom>
+          <a:noFill/>
+        </p:spPr>
+        <p:txBody>
+          <a:bodyPr wrap="square">
+            <a:spAutoFit/>
+          </a:bodyPr>
+          <a:lstStyle/>
+          <a:p>
+            <a:pPr>
+              <a:spcAft>
+                <a:spcPts val="1000"/>
+              </a:spcAft>
+              <a:defRPr sz="1250">
+                <a:solidFill>
+                  <a:srgbClr val="1E293B"/>
+                </a:solidFill>
+                <a:latin typeface="Aptos"/>
+              </a:defRPr>
+            </a:pPr>
+            <a:r>
+              <a:rPr dirty="0"/>
+              <a:t>• Purpose: understand the dataset before making any changes.</a:t>
+            </a:r>
+          </a:p>
+          <a:p>
+            <a:pPr>
+              <a:spcAft>
+                <a:spcPts val="1000"/>
+              </a:spcAft>
+              <a:defRPr sz="1250">
+                <a:solidFill>
+                  <a:srgbClr val="1E293B"/>
+                </a:solidFill>
+                <a:latin typeface="Aptos"/>
+              </a:defRPr>
+            </a:pPr>
+            <a:r>
+              <a:rPr dirty="0"/>
+              <a:t>• Initial missing-value counts are identified with </a:t>
+            </a:r>
+            <a:r>
+              <a:rPr dirty="0" err="1"/>
+              <a:t>isnull</a:t>
+            </a:r>
+            <a:r>
+              <a:rPr dirty="0"/>
+              <a:t>().sum().</a:t>
+            </a:r>
+          </a:p>
+        </p:txBody>
+      </p:sp>
+      <p:sp>
+        <p:nvSpPr>
+          <p:cNvPr id="20" name="Rectangle 19"/>
           <p:cNvSpPr/>
           <p:nvPr/>
         </p:nvSpPr>
         <p:spPr>
           <a:xfrm>
-            <a:off x="1344168" y="4129291"/>
+            <a:off x="594360" y="6473952"/>
+            <a:ext cx="10972800" cy="10972"/>
+          </a:xfrm>
+          <a:prstGeom prst="rect">
+            <a:avLst/>
+          </a:prstGeom>
+          <a:solidFill>
+            <a:srgbClr val="E2E8F0"/>
+          </a:solidFill>
+          <a:ln>
+            <a:noFill/>
+          </a:ln>
+        </p:spPr>
+        <p:style>
+          <a:lnRef idx="1">
+            <a:schemeClr val="accent1"/>
+          </a:lnRef>
+          <a:fillRef idx="3">
+            <a:schemeClr val="accent1"/>
+          </a:fillRef>
+          <a:effectRef idx="2">
+            <a:schemeClr val="accent1"/>
+          </a:effectRef>
+          <a:fontRef idx="minor">
+            <a:schemeClr val="lt1"/>
+          </a:fontRef>
+        </p:style>
+        <p:txBody>
+          <a:bodyPr rtlCol="0" anchor="ctr"/>
+          <a:lstStyle/>
+          <a:p>
+            <a:pPr algn="ctr"/>
+            <a:endParaRPr/>
+          </a:p>
+        </p:txBody>
+      </p:sp>
+      <p:sp>
+        <p:nvSpPr>
+          <p:cNvPr id="21" name="TextBox 20"/>
+          <p:cNvSpPr txBox="1"/>
+          <p:nvPr/>
+        </p:nvSpPr>
+        <p:spPr>
+          <a:xfrm>
+            <a:off x="10881360" y="6519672"/>
+            <a:ext cx="640080" cy="201168"/>
+          </a:xfrm>
+          <a:prstGeom prst="rect">
+            <a:avLst/>
+          </a:prstGeom>
+          <a:noFill/>
+        </p:spPr>
+        <p:txBody>
+          <a:bodyPr wrap="none">
+            <a:spAutoFit/>
+          </a:bodyPr>
+          <a:lstStyle/>
+          <a:p>
+            <a:pPr algn="r">
+              <a:defRPr sz="900">
+                <a:solidFill>
+                  <a:srgbClr val="64748B"/>
+                </a:solidFill>
+                <a:latin typeface="Aptos"/>
+              </a:defRPr>
+            </a:pPr>
+            <a:r>
+              <a:t>7</a:t>
+            </a:r>
+          </a:p>
+        </p:txBody>
+      </p:sp>
+      <p:cxnSp>
+        <p:nvCxnSpPr>
+          <p:cNvPr id="22" name="Straight Connector 21"/>
+          <p:cNvCxnSpPr/>
+          <p:nvPr/>
+        </p:nvCxnSpPr>
+        <p:spPr>
+          <a:xfrm>
+            <a:off x="731520" y="950976"/>
+            <a:ext cx="10835640" cy="0"/>
+          </a:xfrm>
+          <a:prstGeom prst="line">
+            <a:avLst/>
+          </a:prstGeom>
+        </p:spPr>
+        <p:style>
+          <a:lnRef idx="1">
+            <a:schemeClr val="accent1"/>
+          </a:lnRef>
+          <a:fillRef idx="0">
+            <a:schemeClr val="accent1"/>
+          </a:fillRef>
+          <a:effectRef idx="0">
+            <a:schemeClr val="accent1"/>
+          </a:effectRef>
+          <a:fontRef idx="minor">
+            <a:schemeClr val="tx1"/>
+          </a:fontRef>
+        </p:style>
+      </p:cxnSp>
+      <p:sp>
+        <p:nvSpPr>
+          <p:cNvPr id="26" name="Rectangle 25"/>
+          <p:cNvSpPr/>
+          <p:nvPr/>
+        </p:nvSpPr>
+        <p:spPr>
+          <a:xfrm>
+            <a:off x="1353312" y="2565660"/>
             <a:ext cx="10058400" cy="329184"/>
           </a:xfrm>
           <a:prstGeom prst="rect">
@@ -17600,13 +17962,13 @@
       </p:sp>
       <p:sp>
         <p:nvSpPr>
-          <p:cNvPr id="17" name="TextBox 16"/>
-          <p:cNvSpPr txBox="1"/>
-          <p:nvPr/>
-        </p:nvSpPr>
-        <p:spPr>
-          <a:xfrm>
-            <a:off x="1399032" y="4123593"/>
+          <p:cNvPr id="9" name="TextBox 8"/>
+          <p:cNvSpPr txBox="1"/>
+          <p:nvPr/>
+        </p:nvSpPr>
+        <p:spPr>
+          <a:xfrm>
+            <a:off x="1399032" y="2560485"/>
             <a:ext cx="10012680" cy="356616"/>
           </a:xfrm>
           <a:prstGeom prst="rect">
@@ -17631,225 +17993,26 @@
                 <a:latin typeface="Consolas"/>
               </a:defRPr>
             </a:pPr>
-            <a:endParaRPr/>
-          </a:p>
-        </p:txBody>
-      </p:sp>
-      <p:sp>
-        <p:nvSpPr>
-          <p:cNvPr id="18" name="TextBox 17"/>
-          <p:cNvSpPr txBox="1"/>
-          <p:nvPr/>
-        </p:nvSpPr>
-        <p:spPr>
-          <a:xfrm>
-            <a:off x="1389888" y="4158223"/>
-            <a:ext cx="10012680" cy="356616"/>
-          </a:xfrm>
-          <a:prstGeom prst="rect">
-            <a:avLst/>
-          </a:prstGeom>
-          <a:noFill/>
-        </p:spPr>
-        <p:txBody>
-          <a:bodyPr wrap="none">
-            <a:spAutoFit/>
-          </a:bodyPr>
-          <a:lstStyle/>
-          <a:p>
-            <a:pPr>
-              <a:spcAft>
-                <a:spcPts val="0"/>
-              </a:spcAft>
-              <a:defRPr sz="1150">
-                <a:solidFill>
-                  <a:srgbClr val="E2E8F0"/>
-                </a:solidFill>
-                <a:latin typeface="Consolas"/>
-              </a:defRPr>
-            </a:pPr>
             <a:r>
               <a:rPr dirty="0"/>
-              <a:t>cs.info()</a:t>
-            </a:r>
-          </a:p>
-        </p:txBody>
-      </p:sp>
-      <p:sp>
-        <p:nvSpPr>
-          <p:cNvPr id="19" name="TextBox 18"/>
-          <p:cNvSpPr txBox="1"/>
-          <p:nvPr/>
-        </p:nvSpPr>
-        <p:spPr>
-          <a:xfrm>
-            <a:off x="816489" y="5308302"/>
-            <a:ext cx="10332720" cy="640080"/>
-          </a:xfrm>
-          <a:prstGeom prst="rect">
-            <a:avLst/>
-          </a:prstGeom>
-          <a:noFill/>
-        </p:spPr>
-        <p:txBody>
-          <a:bodyPr wrap="square">
-            <a:spAutoFit/>
-          </a:bodyPr>
-          <a:lstStyle/>
-          <a:p>
-            <a:pPr>
-              <a:spcAft>
-                <a:spcPts val="1000"/>
-              </a:spcAft>
-              <a:defRPr sz="1250">
-                <a:solidFill>
-                  <a:srgbClr val="1E293B"/>
-                </a:solidFill>
-                <a:latin typeface="Aptos"/>
-              </a:defRPr>
-            </a:pPr>
+              <a:t>import </a:t>
+            </a:r>
+            <a:r>
+              <a:rPr dirty="0" err="1"/>
+              <a:t>numpy</a:t>
+            </a:r>
             <a:r>
               <a:rPr dirty="0"/>
-              <a:t>• Purpose: understand the dataset before making any changes.</a:t>
-            </a:r>
-          </a:p>
-          <a:p>
-            <a:pPr>
-              <a:spcAft>
-                <a:spcPts val="1000"/>
-              </a:spcAft>
-              <a:defRPr sz="1250">
-                <a:solidFill>
-                  <a:srgbClr val="1E293B"/>
-                </a:solidFill>
-                <a:latin typeface="Aptos"/>
-              </a:defRPr>
-            </a:pPr>
-            <a:r>
-              <a:rPr dirty="0"/>
-              <a:t>• Initial missing-value counts are identified with </a:t>
+              <a:t> as </a:t>
             </a:r>
             <a:r>
               <a:rPr dirty="0" err="1"/>
-              <a:t>isnull</a:t>
-            </a:r>
-            <a:r>
-              <a:rPr dirty="0"/>
-              <a:t>().sum().</a:t>
-            </a:r>
-          </a:p>
-        </p:txBody>
-      </p:sp>
-      <p:sp>
-        <p:nvSpPr>
-          <p:cNvPr id="20" name="Rectangle 19"/>
-          <p:cNvSpPr/>
-          <p:nvPr/>
-        </p:nvSpPr>
-        <p:spPr>
-          <a:xfrm>
-            <a:off x="594360" y="6473952"/>
-            <a:ext cx="10972800" cy="10972"/>
-          </a:xfrm>
-          <a:prstGeom prst="rect">
-            <a:avLst/>
-          </a:prstGeom>
-          <a:solidFill>
-            <a:srgbClr val="E2E8F0"/>
-          </a:solidFill>
-          <a:ln>
-            <a:noFill/>
-          </a:ln>
-        </p:spPr>
-        <p:style>
-          <a:lnRef idx="1">
-            <a:schemeClr val="accent1"/>
-          </a:lnRef>
-          <a:fillRef idx="3">
-            <a:schemeClr val="accent1"/>
-          </a:fillRef>
-          <a:effectRef idx="2">
-            <a:schemeClr val="accent1"/>
-          </a:effectRef>
-          <a:fontRef idx="minor">
-            <a:schemeClr val="lt1"/>
-          </a:fontRef>
-        </p:style>
-        <p:txBody>
-          <a:bodyPr rtlCol="0" anchor="ctr"/>
-          <a:lstStyle/>
-          <a:p>
-            <a:pPr algn="ctr"/>
-            <a:endParaRPr/>
-          </a:p>
-        </p:txBody>
-      </p:sp>
-      <p:sp>
-        <p:nvSpPr>
-          <p:cNvPr id="21" name="TextBox 20"/>
-          <p:cNvSpPr txBox="1"/>
-          <p:nvPr/>
-        </p:nvSpPr>
-        <p:spPr>
-          <a:xfrm>
-            <a:off x="10881360" y="6519672"/>
-            <a:ext cx="640080" cy="201168"/>
-          </a:xfrm>
-          <a:prstGeom prst="rect">
-            <a:avLst/>
-          </a:prstGeom>
-          <a:noFill/>
-        </p:spPr>
-        <p:txBody>
-          <a:bodyPr wrap="none">
-            <a:spAutoFit/>
-          </a:bodyPr>
-          <a:lstStyle/>
-          <a:p>
-            <a:pPr algn="r">
-              <a:defRPr sz="900">
-                <a:solidFill>
-                  <a:srgbClr val="64748B"/>
-                </a:solidFill>
-                <a:latin typeface="Aptos"/>
-              </a:defRPr>
-            </a:pPr>
-            <a:r>
-              <a:t>7</a:t>
-            </a:r>
-          </a:p>
-        </p:txBody>
-      </p:sp>
-      <p:cxnSp>
-        <p:nvCxnSpPr>
-          <p:cNvPr id="22" name="Straight Connector 21"/>
-          <p:cNvCxnSpPr/>
-          <p:nvPr/>
-        </p:nvCxnSpPr>
-        <p:spPr>
-          <a:xfrm>
-            <a:off x="731520" y="950976"/>
-            <a:ext cx="10835640" cy="0"/>
-          </a:xfrm>
-          <a:prstGeom prst="line">
-            <a:avLst/>
-          </a:prstGeom>
-        </p:spPr>
-        <p:style>
-          <a:lnRef idx="1">
-            <a:schemeClr val="accent1"/>
-          </a:lnRef>
-          <a:fillRef idx="0">
-            <a:schemeClr val="accent1"/>
-          </a:fillRef>
-          <a:effectRef idx="0">
-            <a:schemeClr val="accent1"/>
-          </a:effectRef>
-          <a:fontRef idx="minor">
-            <a:schemeClr val="tx1"/>
-          </a:fontRef>
-        </p:style>
-      </p:cxnSp>
+              <a:t>np</a:t>
+            </a:r>
+            <a:endParaRPr dirty="0"/>
+          </a:p>
+        </p:txBody>
+      </p:sp>
     </p:spTree>
   </p:cSld>
   <p:clrMapOvr>
@@ -18287,7 +18450,12 @@
               </a:defRPr>
             </a:pPr>
             <a:r>
-              <a:t>clean_cs.isnull().sum()</a:t>
+              <a:rPr dirty="0" err="1"/>
+              <a:t>clean_cs.isnull</a:t>
+            </a:r>
+            <a:r>
+              <a:rPr dirty="0"/>
+              <a:t>().sum()</a:t>
             </a:r>
           </a:p>
         </p:txBody>
@@ -18856,7 +19024,16 @@
               </a:defRPr>
             </a:pPr>
             <a:r>
-              <a:t>8. Step 3 — Clean the Item Column</a:t>
+              <a:rPr dirty="0"/>
+              <a:t>8. Step </a:t>
+            </a:r>
+            <a:r>
+              <a:rPr dirty="0" smtClean="0"/>
+              <a:t>3 </a:t>
+            </a:r>
+            <a:r>
+              <a:rPr dirty="0"/>
+              <a:t>— Clean the Item Column</a:t>
             </a:r>
           </a:p>
         </p:txBody>
@@ -18921,8 +19098,8 @@
         </p:nvSpPr>
         <p:spPr>
           <a:xfrm>
-            <a:off x="685800" y="2067752"/>
-            <a:ext cx="10881360" cy="1167154"/>
+            <a:off x="685800" y="1783079"/>
+            <a:ext cx="10881360" cy="2531680"/>
           </a:xfrm>
           <a:prstGeom prst="roundRect">
             <a:avLst/>
@@ -18967,7 +19144,7 @@
         </p:nvSpPr>
         <p:spPr>
           <a:xfrm>
-            <a:off x="795528" y="2223200"/>
+            <a:off x="795528" y="1938527"/>
             <a:ext cx="640080" cy="320040"/>
           </a:xfrm>
           <a:prstGeom prst="rect">
@@ -19003,7 +19180,7 @@
         </p:nvSpPr>
         <p:spPr>
           <a:xfrm>
-            <a:off x="1344168" y="2305493"/>
+            <a:off x="1344168" y="2020820"/>
             <a:ext cx="10058400" cy="329184"/>
           </a:xfrm>
           <a:prstGeom prst="rect">
@@ -19041,53 +19218,14 @@
       </p:sp>
       <p:sp>
         <p:nvSpPr>
-          <p:cNvPr id="8" name="TextBox 7"/>
-          <p:cNvSpPr txBox="1"/>
-          <p:nvPr/>
-        </p:nvSpPr>
-        <p:spPr>
-          <a:xfrm>
-            <a:off x="1399032" y="2323784"/>
-            <a:ext cx="10012680" cy="356616"/>
-          </a:xfrm>
-          <a:prstGeom prst="rect">
-            <a:avLst/>
-          </a:prstGeom>
-          <a:noFill/>
-        </p:spPr>
-        <p:txBody>
-          <a:bodyPr wrap="none">
-            <a:spAutoFit/>
-          </a:bodyPr>
-          <a:lstStyle/>
-          <a:p>
-            <a:pPr>
-              <a:spcAft>
-                <a:spcPts val="0"/>
-              </a:spcAft>
-              <a:defRPr sz="1150">
-                <a:solidFill>
-                  <a:srgbClr val="E2E8F0"/>
-                </a:solidFill>
-                <a:latin typeface="Consolas"/>
-              </a:defRPr>
-            </a:pPr>
-            <a:r>
-              <a:t>clean_cs["Item"] = clean_cs["Item"].replace(["UNKNOWN", "ERROR"], np.nan)</a:t>
-            </a:r>
-          </a:p>
-        </p:txBody>
-      </p:sp>
-      <p:sp>
-        <p:nvSpPr>
           <p:cNvPr id="9" name="Rectangle 8"/>
           <p:cNvSpPr/>
           <p:nvPr/>
         </p:nvSpPr>
         <p:spPr>
           <a:xfrm>
-            <a:off x="1344168" y="2616388"/>
-            <a:ext cx="10058400" cy="329184"/>
+            <a:off x="1344168" y="2331715"/>
+            <a:ext cx="10058400" cy="1747128"/>
           </a:xfrm>
           <a:prstGeom prst="rect">
             <a:avLst/>
@@ -19117,7 +19255,10 @@
           <a:bodyPr rtlCol="0" anchor="ctr"/>
           <a:lstStyle/>
           <a:p>
-            <a:pPr algn="ctr"/>
+            <a:pPr marL="285750" indent="-285750" algn="ctr">
+              <a:buFont typeface="Arial" panose="020B0604020202020204" pitchFamily="34" charset="0"/>
+              <a:buChar char="•"/>
+            </a:pPr>
             <a:endParaRPr/>
           </a:p>
         </p:txBody>
@@ -19130,8 +19271,8 @@
         </p:nvSpPr>
         <p:spPr>
           <a:xfrm>
-            <a:off x="1399032" y="2634679"/>
-            <a:ext cx="10012680" cy="356616"/>
+            <a:off x="1399032" y="3412564"/>
+            <a:ext cx="7215437" cy="269304"/>
           </a:xfrm>
           <a:prstGeom prst="rect">
             <a:avLst/>
@@ -19156,8 +19297,46 @@
               </a:defRPr>
             </a:pPr>
             <a:r>
-              <a:t>clean_cs["Item"] = clean_cs["Item"].fillna("Unknown")</a:t>
-            </a:r>
+              <a:rPr lang="en-IN" dirty="0" err="1"/>
+              <a:t>clean_cs</a:t>
+            </a:r>
+            <a:r>
+              <a:rPr lang="en-IN" dirty="0"/>
+              <a:t>["Item"] = </a:t>
+            </a:r>
+            <a:r>
+              <a:rPr lang="en-IN" dirty="0" err="1"/>
+              <a:t>clean_cs</a:t>
+            </a:r>
+            <a:r>
+              <a:rPr lang="en-IN" dirty="0"/>
+              <a:t>["Item"].</a:t>
+            </a:r>
+            <a:r>
+              <a:rPr lang="en-IN" dirty="0" err="1"/>
+              <a:t>fillna</a:t>
+            </a:r>
+            <a:r>
+              <a:rPr lang="en-IN" dirty="0"/>
+              <a:t>(</a:t>
+            </a:r>
+            <a:r>
+              <a:rPr lang="en-IN" dirty="0" err="1"/>
+              <a:t>clean_cs</a:t>
+            </a:r>
+            <a:r>
+              <a:rPr lang="en-IN" dirty="0"/>
+              <a:t>["Price Per Unit"].map(</a:t>
+            </a:r>
+            <a:r>
+              <a:rPr lang="en-IN" dirty="0" err="1"/>
+              <a:t>item_value</a:t>
+            </a:r>
+            <a:r>
+              <a:rPr lang="en-IN" dirty="0"/>
+              <a:t>))</a:t>
+            </a:r>
+            <a:endParaRPr dirty="0"/>
           </a:p>
         </p:txBody>
       </p:sp>
@@ -19169,8 +19348,8 @@
         </p:nvSpPr>
         <p:spPr>
           <a:xfrm>
-            <a:off x="822960" y="3886200"/>
-            <a:ext cx="10241280" cy="1737360"/>
+            <a:off x="822960" y="4736592"/>
+            <a:ext cx="10241280" cy="713016"/>
           </a:xfrm>
           <a:prstGeom prst="rect">
             <a:avLst/>
@@ -19195,8 +19374,14 @@
               </a:defRPr>
             </a:pPr>
             <a:r>
-              <a:t>• UNKNOWN and ERROR are treated as invalid placeholders and converted to missing values.</a:t>
-            </a:r>
+              <a:rPr dirty="0"/>
+              <a:t>• UNKNOWN and ERROR are treated as invalid placeholders and converted to missing values</a:t>
+            </a:r>
+            <a:r>
+              <a:rPr dirty="0" smtClean="0"/>
+              <a:t>.</a:t>
+            </a:r>
+            <a:endParaRPr dirty="0"/>
           </a:p>
           <a:p>
             <a:pPr>
@@ -19211,24 +19396,30 @@
               </a:defRPr>
             </a:pPr>
             <a:r>
-              <a:t>• Missing Item values are then filled with the explicit category “Unknown”.</a:t>
-            </a:r>
-          </a:p>
-          <a:p>
-            <a:pPr>
-              <a:spcAft>
-                <a:spcPts val="1000"/>
-              </a:spcAft>
-              <a:defRPr sz="1600">
-                <a:solidFill>
-                  <a:srgbClr val="1E293B"/>
-                </a:solidFill>
-                <a:latin typeface="Aptos"/>
-              </a:defRPr>
-            </a:pPr>
-            <a:r>
-              <a:t>• This keeps the row while making the category consistent.</a:t>
-            </a:r>
+              <a:rPr dirty="0"/>
+              <a:t>• Missing Item values are then </a:t>
+            </a:r>
+            <a:r>
+              <a:rPr lang="en-US" dirty="0" smtClean="0"/>
+              <a:t>mapped</a:t>
+            </a:r>
+            <a:r>
+              <a:rPr dirty="0" smtClean="0"/>
+              <a:t> with</a:t>
+            </a:r>
+            <a:r>
+              <a:rPr lang="en-US" dirty="0" smtClean="0"/>
+              <a:t> </a:t>
+            </a:r>
+            <a:r>
+              <a:rPr lang="en-US" dirty="0" err="1" smtClean="0"/>
+              <a:t>item_value</a:t>
+            </a:r>
+            <a:r>
+              <a:rPr dirty="0" smtClean="0"/>
+              <a:t>.</a:t>
+            </a:r>
+            <a:endParaRPr dirty="0"/>
           </a:p>
         </p:txBody>
       </p:sp>
@@ -19342,6 +19533,213 @@
           </a:fontRef>
         </p:style>
       </p:cxnSp>
+      <p:sp>
+        <p:nvSpPr>
+          <p:cNvPr id="8" name="TextBox 7"/>
+          <p:cNvSpPr txBox="1"/>
+          <p:nvPr/>
+        </p:nvSpPr>
+        <p:spPr>
+          <a:xfrm>
+            <a:off x="1399032" y="2039111"/>
+            <a:ext cx="6152646" cy="1508105"/>
+          </a:xfrm>
+          <a:prstGeom prst="rect">
+            <a:avLst/>
+          </a:prstGeom>
+          <a:noFill/>
+        </p:spPr>
+        <p:txBody>
+          <a:bodyPr wrap="none">
+            <a:spAutoFit/>
+          </a:bodyPr>
+          <a:lstStyle/>
+          <a:p>
+            <a:pPr>
+              <a:spcAft>
+                <a:spcPts val="0"/>
+              </a:spcAft>
+              <a:defRPr sz="1150">
+                <a:solidFill>
+                  <a:srgbClr val="E2E8F0"/>
+                </a:solidFill>
+                <a:latin typeface="Consolas"/>
+              </a:defRPr>
+            </a:pPr>
+            <a:r>
+              <a:rPr dirty="0" err="1"/>
+              <a:t>clean_cs</a:t>
+            </a:r>
+            <a:r>
+              <a:rPr dirty="0"/>
+              <a:t>["Item"] = </a:t>
+            </a:r>
+            <a:r>
+              <a:rPr dirty="0" err="1"/>
+              <a:t>clean_cs</a:t>
+            </a:r>
+            <a:r>
+              <a:rPr dirty="0"/>
+              <a:t>["Item"].replace(["UNKNOWN", "ERROR"], </a:t>
+            </a:r>
+            <a:r>
+              <a:rPr dirty="0" err="1"/>
+              <a:t>np.nan</a:t>
+            </a:r>
+            <a:r>
+              <a:rPr dirty="0" smtClean="0"/>
+              <a:t>)</a:t>
+            </a:r>
+            <a:endParaRPr lang="en-US" dirty="0" smtClean="0"/>
+          </a:p>
+          <a:p>
+            <a:pPr>
+              <a:spcAft>
+                <a:spcPts val="0"/>
+              </a:spcAft>
+              <a:defRPr sz="1150">
+                <a:solidFill>
+                  <a:srgbClr val="E2E8F0"/>
+                </a:solidFill>
+                <a:latin typeface="Consolas"/>
+              </a:defRPr>
+            </a:pPr>
+            <a:endParaRPr lang="en-US" dirty="0"/>
+          </a:p>
+          <a:p>
+            <a:pPr>
+              <a:spcAft>
+                <a:spcPts val="0"/>
+              </a:spcAft>
+              <a:defRPr sz="1150">
+                <a:solidFill>
+                  <a:srgbClr val="E2E8F0"/>
+                </a:solidFill>
+                <a:latin typeface="Consolas"/>
+              </a:defRPr>
+            </a:pPr>
+            <a:endParaRPr lang="en-US" dirty="0" smtClean="0"/>
+          </a:p>
+          <a:p>
+            <a:pPr>
+              <a:spcAft>
+                <a:spcPts val="0"/>
+              </a:spcAft>
+              <a:defRPr sz="1150">
+                <a:solidFill>
+                  <a:srgbClr val="E2E8F0"/>
+                </a:solidFill>
+                <a:latin typeface="Consolas"/>
+              </a:defRPr>
+            </a:pPr>
+            <a:r>
+              <a:rPr lang="en-US" dirty="0" err="1"/>
+              <a:t>item_value</a:t>
+            </a:r>
+            <a:r>
+              <a:rPr lang="en-US" dirty="0"/>
+              <a:t> = (</a:t>
+            </a:r>
+            <a:r>
+              <a:rPr lang="en-US" dirty="0" err="1"/>
+              <a:t>clean_cs.dropna</a:t>
+            </a:r>
+            <a:r>
+              <a:rPr lang="en-US" dirty="0"/>
+              <a:t>(subset=["Item"])             </a:t>
+            </a:r>
+            <a:endParaRPr lang="en-US" dirty="0" smtClean="0"/>
+          </a:p>
+          <a:p>
+            <a:pPr>
+              <a:spcAft>
+                <a:spcPts val="0"/>
+              </a:spcAft>
+              <a:defRPr sz="1150">
+                <a:solidFill>
+                  <a:srgbClr val="E2E8F0"/>
+                </a:solidFill>
+                <a:latin typeface="Consolas"/>
+              </a:defRPr>
+            </a:pPr>
+            <a:r>
+              <a:rPr lang="en-US" dirty="0" smtClean="0"/>
+              <a:t>              .</a:t>
+            </a:r>
+            <a:r>
+              <a:rPr lang="en-US" dirty="0" err="1"/>
+              <a:t>groupby</a:t>
+            </a:r>
+            <a:r>
+              <a:rPr lang="en-US" dirty="0"/>
+              <a:t>("Price Per Unit")["Item"]             </a:t>
+            </a:r>
+            <a:endParaRPr lang="en-US" dirty="0" smtClean="0"/>
+          </a:p>
+          <a:p>
+            <a:pPr>
+              <a:spcAft>
+                <a:spcPts val="0"/>
+              </a:spcAft>
+              <a:defRPr sz="1150">
+                <a:solidFill>
+                  <a:srgbClr val="E2E8F0"/>
+                </a:solidFill>
+                <a:latin typeface="Consolas"/>
+              </a:defRPr>
+            </a:pPr>
+            <a:r>
+              <a:rPr lang="en-US" dirty="0" smtClean="0"/>
+              <a:t>              .</a:t>
+            </a:r>
+            <a:r>
+              <a:rPr lang="en-US" dirty="0" err="1"/>
+              <a:t>agg</a:t>
+            </a:r>
+            <a:r>
+              <a:rPr lang="en-US" dirty="0"/>
+              <a:t>(lambda x: </a:t>
+            </a:r>
+            <a:r>
+              <a:rPr lang="en-US" dirty="0" err="1"/>
+              <a:t>x.mode</a:t>
+            </a:r>
+            <a:r>
+              <a:rPr lang="en-US" dirty="0"/>
+              <a:t>()[0]))</a:t>
+            </a:r>
+            <a:endParaRPr lang="en-US" dirty="0" smtClean="0"/>
+          </a:p>
+          <a:p>
+            <a:pPr>
+              <a:spcAft>
+                <a:spcPts val="0"/>
+              </a:spcAft>
+              <a:defRPr sz="1150">
+                <a:solidFill>
+                  <a:srgbClr val="E2E8F0"/>
+                </a:solidFill>
+                <a:latin typeface="Consolas"/>
+              </a:defRPr>
+            </a:pPr>
+            <a:endParaRPr lang="en-US" dirty="0"/>
+          </a:p>
+          <a:p>
+            <a:pPr>
+              <a:spcAft>
+                <a:spcPts val="0"/>
+              </a:spcAft>
+              <a:defRPr sz="1150">
+                <a:solidFill>
+                  <a:srgbClr val="E2E8F0"/>
+                </a:solidFill>
+                <a:latin typeface="Consolas"/>
+              </a:defRPr>
+            </a:pPr>
+            <a:endParaRPr lang="en-US" dirty="0" smtClean="0"/>
+          </a:p>
+        </p:txBody>
+      </p:sp>
     </p:spTree>
   </p:cSld>
   <p:clrMapOvr>
